--- a/output_pptx/Yet_Not_I_But_Through_Christ_In_Me.pptx
+++ b/output_pptx/Yet_Not_I_But_Through_Christ_In_Me.pptx
@@ -3112,8 +3112,8 @@
         </p:nvSpPr>
         <p:spPr>
           <a:xfrm>
-            <a:off x="594360" y="1837944"/>
-            <a:ext cx="11002975" cy="685800"/>
+            <a:off x="640080" y="1650492"/>
+            <a:ext cx="10911535" cy="731520"/>
           </a:xfrm>
           <a:prstGeom prst="rect">
             <a:avLst/>
@@ -3128,7 +3128,7 @@
           <a:p>
             <a:pPr algn="ctr"/>
             <a:r>
-              <a:rPr sz="4400" b="1" i="0">
+              <a:rPr sz="4800" b="1" i="0">
                 <a:solidFill>
                   <a:srgbClr val="FFFFFF"/>
                 </a:solidFill>
@@ -3147,8 +3147,8 @@
         </p:nvSpPr>
         <p:spPr>
           <a:xfrm>
-            <a:off x="594360" y="2560320"/>
-            <a:ext cx="11002975" cy="384048"/>
+            <a:off x="640080" y="2418588"/>
+            <a:ext cx="10911535" cy="365760"/>
           </a:xfrm>
           <a:prstGeom prst="rect">
             <a:avLst/>
@@ -3163,9 +3163,9 @@
           <a:p>
             <a:pPr algn="ctr"/>
             <a:r>
-              <a:rPr sz="2144" b="0" i="1">
-                <a:solidFill>
-                  <a:srgbClr val="B4B4B4"/>
+              <a:rPr sz="2400" b="0" i="1">
+                <a:solidFill>
+                  <a:srgbClr val="AAAAAA"/>
                 </a:solidFill>
                 <a:latin typeface="Arial"/>
               </a:rPr>
@@ -3182,8 +3182,8 @@
         </p:nvSpPr>
         <p:spPr>
           <a:xfrm>
-            <a:off x="594360" y="2980944"/>
-            <a:ext cx="11002975" cy="347472"/>
+            <a:off x="640080" y="2985516"/>
+            <a:ext cx="10911535" cy="731520"/>
           </a:xfrm>
           <a:prstGeom prst="rect">
             <a:avLst/>
@@ -3198,13 +3198,13 @@
           <a:p>
             <a:pPr algn="ctr"/>
             <a:r>
-              <a:rPr sz="2000" b="0" i="1">
-                <a:solidFill>
-                  <a:srgbClr val="8C8C8C"/>
+              <a:rPr sz="4800" b="1" i="0">
+                <a:solidFill>
+                  <a:srgbClr val="FFFFFF"/>
                 </a:solidFill>
                 <a:latin typeface="Arial"/>
               </a:rPr>
-              <a:t/>
+              <a:t>かけがえのない喜び 愛と深い安らぎ</a:t>
             </a:r>
           </a:p>
         </p:txBody>
@@ -3217,8 +3217,8 @@
         </p:nvSpPr>
         <p:spPr>
           <a:xfrm>
-            <a:off x="594360" y="3529584"/>
-            <a:ext cx="11002975" cy="685800"/>
+            <a:off x="640080" y="3753612"/>
+            <a:ext cx="10911535" cy="365760"/>
           </a:xfrm>
           <a:prstGeom prst="rect">
             <a:avLst/>
@@ -3233,13 +3233,13 @@
           <a:p>
             <a:pPr algn="ctr"/>
             <a:r>
-              <a:rPr sz="4400" b="1" i="0">
-                <a:solidFill>
-                  <a:srgbClr val="FFFFFF"/>
+              <a:rPr sz="2400" b="0" i="1">
+                <a:solidFill>
+                  <a:srgbClr val="AAAAAA"/>
                 </a:solidFill>
                 <a:latin typeface="Arial"/>
               </a:rPr>
-              <a:t>かけがえのない喜び 愛と深い安らぎ</a:t>
+              <a:t>kakegae no nai yorokobi  ai to fukai yasuragi</a:t>
             </a:r>
           </a:p>
         </p:txBody>
@@ -3252,8 +3252,8 @@
         </p:nvSpPr>
         <p:spPr>
           <a:xfrm>
-            <a:off x="594360" y="4251960"/>
-            <a:ext cx="11002975" cy="384048"/>
+            <a:off x="640080" y="4530852"/>
+            <a:ext cx="10911535" cy="310896"/>
           </a:xfrm>
           <a:prstGeom prst="rect">
             <a:avLst/>
@@ -3268,13 +3268,13 @@
           <a:p>
             <a:pPr algn="ctr"/>
             <a:r>
-              <a:rPr sz="2240" b="0" i="1">
-                <a:solidFill>
-                  <a:srgbClr val="B4B4B4"/>
+              <a:rPr sz="2000" b="0" i="1">
+                <a:solidFill>
+                  <a:srgbClr val="828282"/>
                 </a:solidFill>
                 <a:latin typeface="Arial"/>
               </a:rPr>
-              <a:t>kakegae no nai yorokobi  ai to fukai yasuragi</a:t>
+              <a:t>A isso eu me agarro, minha esperança é somente Jesus</a:t>
             </a:r>
           </a:p>
         </p:txBody>
@@ -3287,8 +3287,8 @@
         </p:nvSpPr>
         <p:spPr>
           <a:xfrm>
-            <a:off x="594360" y="4672584"/>
-            <a:ext cx="11002975" cy="347472"/>
+            <a:off x="640080" y="4896612"/>
+            <a:ext cx="10911535" cy="310896"/>
           </a:xfrm>
           <a:prstGeom prst="rect">
             <a:avLst/>
@@ -3305,11 +3305,11 @@
             <a:r>
               <a:rPr sz="2000" b="0" i="1">
                 <a:solidFill>
-                  <a:srgbClr val="8C8C8C"/>
+                  <a:srgbClr val="828282"/>
                 </a:solidFill>
                 <a:latin typeface="Arial"/>
               </a:rPr>
-              <a:t/>
+              <a:t>Pois a minha vida está totalmente ligada à Sua</a:t>
             </a:r>
           </a:p>
         </p:txBody>
@@ -3348,8 +3348,8 @@
         </p:nvSpPr>
         <p:spPr>
           <a:xfrm>
-            <a:off x="594360" y="1837944"/>
-            <a:ext cx="11002975" cy="685800"/>
+            <a:off x="640080" y="1650492"/>
+            <a:ext cx="10911535" cy="731520"/>
           </a:xfrm>
           <a:prstGeom prst="rect">
             <a:avLst/>
@@ -3364,7 +3364,7 @@
           <a:p>
             <a:pPr algn="ctr"/>
             <a:r>
-              <a:rPr sz="4400" b="1" i="0">
+              <a:rPr sz="4800" b="1" i="0">
                 <a:solidFill>
                   <a:srgbClr val="FFFFFF"/>
                 </a:solidFill>
@@ -3383,8 +3383,8 @@
         </p:nvSpPr>
         <p:spPr>
           <a:xfrm>
-            <a:off x="594360" y="2560320"/>
-            <a:ext cx="11002975" cy="384048"/>
+            <a:off x="640080" y="2418588"/>
+            <a:ext cx="10911535" cy="365760"/>
           </a:xfrm>
           <a:prstGeom prst="rect">
             <a:avLst/>
@@ -3399,9 +3399,9 @@
           <a:p>
             <a:pPr algn="ctr"/>
             <a:r>
-              <a:rPr sz="2100" b="0" i="1">
-                <a:solidFill>
-                  <a:srgbClr val="B4B4B4"/>
+              <a:rPr sz="2400" b="0" i="1">
+                <a:solidFill>
+                  <a:srgbClr val="AAAAAA"/>
                 </a:solidFill>
                 <a:latin typeface="Arial"/>
               </a:rPr>
@@ -3418,8 +3418,8 @@
         </p:nvSpPr>
         <p:spPr>
           <a:xfrm>
-            <a:off x="594360" y="2980944"/>
-            <a:ext cx="11002975" cy="347472"/>
+            <a:off x="640080" y="2985516"/>
+            <a:ext cx="10911535" cy="731520"/>
           </a:xfrm>
           <a:prstGeom prst="rect">
             <a:avLst/>
@@ -3434,13 +3434,13 @@
           <a:p>
             <a:pPr algn="ctr"/>
             <a:r>
-              <a:rPr sz="2000" b="0" i="1">
-                <a:solidFill>
-                  <a:srgbClr val="8C8C8C"/>
+              <a:rPr sz="4800" b="1" i="0">
+                <a:solidFill>
+                  <a:srgbClr val="FFFFFF"/>
                 </a:solidFill>
                 <a:latin typeface="Arial"/>
               </a:rPr>
-              <a:t/>
+              <a:t>満たされた心は歌う キリストにあって</a:t>
             </a:r>
           </a:p>
         </p:txBody>
@@ -3453,8 +3453,8 @@
         </p:nvSpPr>
         <p:spPr>
           <a:xfrm>
-            <a:off x="594360" y="3529584"/>
-            <a:ext cx="11002975" cy="685800"/>
+            <a:off x="640080" y="3753612"/>
+            <a:ext cx="10911535" cy="365760"/>
           </a:xfrm>
           <a:prstGeom prst="rect">
             <a:avLst/>
@@ -3469,13 +3469,13 @@
           <a:p>
             <a:pPr algn="ctr"/>
             <a:r>
-              <a:rPr sz="4400" b="1" i="0">
-                <a:solidFill>
-                  <a:srgbClr val="FFFFFF"/>
+              <a:rPr sz="2400" b="0" i="1">
+                <a:solidFill>
+                  <a:srgbClr val="AAAAAA"/>
                 </a:solidFill>
                 <a:latin typeface="Arial"/>
               </a:rPr>
-              <a:t>満たされた心は歌う キリストにあって</a:t>
+              <a:t>mitasareta kokoro wa utau kirisuto ni atte</a:t>
             </a:r>
           </a:p>
         </p:txBody>
@@ -3488,8 +3488,8 @@
         </p:nvSpPr>
         <p:spPr>
           <a:xfrm>
-            <a:off x="594360" y="4251960"/>
-            <a:ext cx="11002975" cy="384048"/>
+            <a:off x="640080" y="4530852"/>
+            <a:ext cx="10911535" cy="310896"/>
           </a:xfrm>
           <a:prstGeom prst="rect">
             <a:avLst/>
@@ -3504,13 +3504,13 @@
           <a:p>
             <a:pPr algn="ctr"/>
             <a:r>
-              <a:rPr sz="2400" b="0" i="1">
-                <a:solidFill>
-                  <a:srgbClr val="B4B4B4"/>
+              <a:rPr sz="2000" b="0" i="1">
+                <a:solidFill>
+                  <a:srgbClr val="828282"/>
                 </a:solidFill>
                 <a:latin typeface="Arial"/>
               </a:rPr>
-              <a:t>mitasareta kokoro wa utau kirisuto ni atte</a:t>
+              <a:t>Óh que estranho e divino, eu posso cantar: Tudo é meu!</a:t>
             </a:r>
           </a:p>
         </p:txBody>
@@ -3523,8 +3523,8 @@
         </p:nvSpPr>
         <p:spPr>
           <a:xfrm>
-            <a:off x="594360" y="4672584"/>
-            <a:ext cx="11002975" cy="347472"/>
+            <a:off x="640080" y="4896612"/>
+            <a:ext cx="10911535" cy="310896"/>
           </a:xfrm>
           <a:prstGeom prst="rect">
             <a:avLst/>
@@ -3541,11 +3541,11 @@
             <a:r>
               <a:rPr sz="2000" b="0" i="1">
                 <a:solidFill>
-                  <a:srgbClr val="8C8C8C"/>
+                  <a:srgbClr val="828282"/>
                 </a:solidFill>
                 <a:latin typeface="Arial"/>
               </a:rPr>
-              <a:t/>
+              <a:t>Não eu, mas Cristo em mim</a:t>
             </a:r>
           </a:p>
         </p:txBody>
@@ -3584,8 +3584,8 @@
         </p:nvSpPr>
         <p:spPr>
           <a:xfrm>
-            <a:off x="594360" y="2258568"/>
-            <a:ext cx="11002975" cy="685800"/>
+            <a:off x="640080" y="2052828"/>
+            <a:ext cx="10911535" cy="731520"/>
           </a:xfrm>
           <a:prstGeom prst="rect">
             <a:avLst/>
@@ -3600,7 +3600,7 @@
           <a:p>
             <a:pPr algn="ctr"/>
             <a:r>
-              <a:rPr sz="2707" b="1" i="0">
+              <a:rPr sz="2900" b="1" i="0">
                 <a:solidFill>
                   <a:srgbClr val="FFFFFF"/>
                 </a:solidFill>
@@ -3619,8 +3619,8 @@
         </p:nvSpPr>
         <p:spPr>
           <a:xfrm>
-            <a:off x="594360" y="2980944"/>
-            <a:ext cx="11002975" cy="347472"/>
+            <a:off x="640080" y="2985516"/>
+            <a:ext cx="10911535" cy="731520"/>
           </a:xfrm>
           <a:prstGeom prst="rect">
             <a:avLst/>
@@ -3635,83 +3635,13 @@
           <a:p>
             <a:pPr algn="ctr"/>
             <a:r>
-              <a:rPr sz="2200" b="0" i="1">
-                <a:solidFill>
-                  <a:srgbClr val="8C8C8C"/>
-                </a:solidFill>
-                <a:latin typeface="Arial"/>
-              </a:rPr>
-              <a:t/>
-            </a:r>
-          </a:p>
-        </p:txBody>
-      </p:sp>
-      <p:sp>
-        <p:nvSpPr>
-          <p:cNvPr id="4" name="TextBox 3"/>
-          <p:cNvSpPr txBox="1"/>
-          <p:nvPr/>
-        </p:nvSpPr>
-        <p:spPr>
-          <a:xfrm>
-            <a:off x="594360" y="3529584"/>
-            <a:ext cx="11002975" cy="685800"/>
-          </a:xfrm>
-          <a:prstGeom prst="rect">
-            <a:avLst/>
-          </a:prstGeom>
-          <a:noFill/>
-        </p:spPr>
-        <p:txBody>
-          <a:bodyPr wrap="square">
-            <a:spAutoFit/>
-          </a:bodyPr>
-          <a:lstStyle/>
-          <a:p>
-            <a:pPr algn="ctr"/>
-            <a:r>
-              <a:rPr sz="3060" b="1" i="0">
+              <a:rPr sz="3300" b="1" i="0">
                 <a:solidFill>
                   <a:srgbClr val="FFFFFF"/>
                 </a:solidFill>
                 <a:latin typeface="Arial"/>
               </a:rPr>
               <a:t>Pois a minha vida está totalmente ligada à Sua</a:t>
-            </a:r>
-          </a:p>
-        </p:txBody>
-      </p:sp>
-      <p:sp>
-        <p:nvSpPr>
-          <p:cNvPr id="5" name="TextBox 4"/>
-          <p:cNvSpPr txBox="1"/>
-          <p:nvPr/>
-        </p:nvSpPr>
-        <p:spPr>
-          <a:xfrm>
-            <a:off x="594360" y="4251960"/>
-            <a:ext cx="11002975" cy="347472"/>
-          </a:xfrm>
-          <a:prstGeom prst="rect">
-            <a:avLst/>
-          </a:prstGeom>
-          <a:noFill/>
-        </p:spPr>
-        <p:txBody>
-          <a:bodyPr wrap="square">
-            <a:spAutoFit/>
-          </a:bodyPr>
-          <a:lstStyle/>
-          <a:p>
-            <a:pPr algn="ctr"/>
-            <a:r>
-              <a:rPr sz="2200" b="0" i="1">
-                <a:solidFill>
-                  <a:srgbClr val="8C8C8C"/>
-                </a:solidFill>
-                <a:latin typeface="Arial"/>
-              </a:rPr>
-              <a:t/>
             </a:r>
           </a:p>
         </p:txBody>
@@ -3750,8 +3680,8 @@
         </p:nvSpPr>
         <p:spPr>
           <a:xfrm>
-            <a:off x="594360" y="2258568"/>
-            <a:ext cx="11002975" cy="685800"/>
+            <a:off x="640080" y="2052828"/>
+            <a:ext cx="10911535" cy="731520"/>
           </a:xfrm>
           <a:prstGeom prst="rect">
             <a:avLst/>
@@ -3766,7 +3696,7 @@
           <a:p>
             <a:pPr algn="ctr"/>
             <a:r>
-              <a:rPr sz="2607" b="1" i="0">
+              <a:rPr sz="2800" b="1" i="0">
                 <a:solidFill>
                   <a:srgbClr val="FFFFFF"/>
                 </a:solidFill>
@@ -3785,8 +3715,8 @@
         </p:nvSpPr>
         <p:spPr>
           <a:xfrm>
-            <a:off x="594360" y="2980944"/>
-            <a:ext cx="11002975" cy="347472"/>
+            <a:off x="640080" y="2985516"/>
+            <a:ext cx="10911535" cy="731520"/>
           </a:xfrm>
           <a:prstGeom prst="rect">
             <a:avLst/>
@@ -3801,83 +3731,13 @@
           <a:p>
             <a:pPr algn="ctr"/>
             <a:r>
-              <a:rPr sz="2200" b="0" i="1">
-                <a:solidFill>
-                  <a:srgbClr val="8C8C8C"/>
-                </a:solidFill>
-                <a:latin typeface="Arial"/>
-              </a:rPr>
-              <a:t/>
-            </a:r>
-          </a:p>
-        </p:txBody>
-      </p:sp>
-      <p:sp>
-        <p:nvSpPr>
-          <p:cNvPr id="4" name="TextBox 3"/>
-          <p:cNvSpPr txBox="1"/>
-          <p:nvPr/>
-        </p:nvSpPr>
-        <p:spPr>
-          <a:xfrm>
-            <a:off x="594360" y="3529584"/>
-            <a:ext cx="11002975" cy="685800"/>
-          </a:xfrm>
-          <a:prstGeom prst="rect">
-            <a:avLst/>
-          </a:prstGeom>
-          <a:noFill/>
-        </p:spPr>
-        <p:txBody>
-          <a:bodyPr wrap="square">
-            <a:spAutoFit/>
-          </a:bodyPr>
-          <a:lstStyle/>
-          <a:p>
-            <a:pPr algn="ctr"/>
-            <a:r>
-              <a:rPr sz="4400" b="1" i="0">
+              <a:rPr sz="4800" b="1" i="0">
                 <a:solidFill>
                   <a:srgbClr val="FFFFFF"/>
                 </a:solidFill>
                 <a:latin typeface="Arial"/>
               </a:rPr>
               <a:t>Não eu, mas Cristo em mim</a:t>
-            </a:r>
-          </a:p>
-        </p:txBody>
-      </p:sp>
-      <p:sp>
-        <p:nvSpPr>
-          <p:cNvPr id="5" name="TextBox 4"/>
-          <p:cNvSpPr txBox="1"/>
-          <p:nvPr/>
-        </p:nvSpPr>
-        <p:spPr>
-          <a:xfrm>
-            <a:off x="594360" y="4251960"/>
-            <a:ext cx="11002975" cy="347472"/>
-          </a:xfrm>
-          <a:prstGeom prst="rect">
-            <a:avLst/>
-          </a:prstGeom>
-          <a:noFill/>
-        </p:spPr>
-        <p:txBody>
-          <a:bodyPr wrap="square">
-            <a:spAutoFit/>
-          </a:bodyPr>
-          <a:lstStyle/>
-          <a:p>
-            <a:pPr algn="ctr"/>
-            <a:r>
-              <a:rPr sz="2200" b="0" i="1">
-                <a:solidFill>
-                  <a:srgbClr val="8C8C8C"/>
-                </a:solidFill>
-                <a:latin typeface="Arial"/>
-              </a:rPr>
-              <a:t/>
             </a:r>
           </a:p>
         </p:txBody>
@@ -3916,8 +3776,8 @@
         </p:nvSpPr>
         <p:spPr>
           <a:xfrm>
-            <a:off x="594360" y="2258568"/>
-            <a:ext cx="11002975" cy="685800"/>
+            <a:off x="640080" y="2052828"/>
+            <a:ext cx="10911535" cy="731520"/>
           </a:xfrm>
           <a:prstGeom prst="rect">
             <a:avLst/>
@@ -3932,7 +3792,7 @@
           <a:p>
             <a:pPr algn="ctr"/>
             <a:r>
-              <a:rPr sz="3274" b="1" i="0">
+              <a:rPr sz="3500" b="1" i="0">
                 <a:solidFill>
                   <a:srgbClr val="FFFFFF"/>
                 </a:solidFill>
@@ -3951,8 +3811,8 @@
         </p:nvSpPr>
         <p:spPr>
           <a:xfrm>
-            <a:off x="594360" y="2980944"/>
-            <a:ext cx="11002975" cy="347472"/>
+            <a:off x="640080" y="2985516"/>
+            <a:ext cx="10911535" cy="731520"/>
           </a:xfrm>
           <a:prstGeom prst="rect">
             <a:avLst/>
@@ -3967,83 +3827,13 @@
           <a:p>
             <a:pPr algn="ctr"/>
             <a:r>
-              <a:rPr sz="2200" b="0" i="1">
-                <a:solidFill>
-                  <a:srgbClr val="8C8C8C"/>
-                </a:solidFill>
-                <a:latin typeface="Arial"/>
-              </a:rPr>
-              <a:t/>
-            </a:r>
-          </a:p>
-        </p:txBody>
-      </p:sp>
-      <p:sp>
-        <p:nvSpPr>
-          <p:cNvPr id="4" name="TextBox 3"/>
-          <p:cNvSpPr txBox="1"/>
-          <p:nvPr/>
-        </p:nvSpPr>
-        <p:spPr>
-          <a:xfrm>
-            <a:off x="594360" y="3529584"/>
-            <a:ext cx="11002975" cy="685800"/>
-          </a:xfrm>
-          <a:prstGeom prst="rect">
-            <a:avLst/>
-          </a:prstGeom>
-          <a:noFill/>
-        </p:spPr>
-        <p:txBody>
-          <a:bodyPr wrap="square">
-            <a:spAutoFit/>
-          </a:bodyPr>
-          <a:lstStyle/>
-          <a:p>
-            <a:pPr algn="ctr"/>
-            <a:r>
-              <a:rPr sz="3610" b="1" i="0">
+              <a:rPr sz="3900" b="1" i="0">
                 <a:solidFill>
                   <a:srgbClr val="FFFFFF"/>
                 </a:solidFill>
                 <a:latin typeface="Arial"/>
               </a:rPr>
               <a:t>Pois ao meu lado o Salvador permanecerá</a:t>
-            </a:r>
-          </a:p>
-        </p:txBody>
-      </p:sp>
-      <p:sp>
-        <p:nvSpPr>
-          <p:cNvPr id="5" name="TextBox 4"/>
-          <p:cNvSpPr txBox="1"/>
-          <p:nvPr/>
-        </p:nvSpPr>
-        <p:spPr>
-          <a:xfrm>
-            <a:off x="594360" y="4251960"/>
-            <a:ext cx="11002975" cy="347472"/>
-          </a:xfrm>
-          <a:prstGeom prst="rect">
-            <a:avLst/>
-          </a:prstGeom>
-          <a:noFill/>
-        </p:spPr>
-        <p:txBody>
-          <a:bodyPr wrap="square">
-            <a:spAutoFit/>
-          </a:bodyPr>
-          <a:lstStyle/>
-          <a:p>
-            <a:pPr algn="ctr"/>
-            <a:r>
-              <a:rPr sz="2200" b="0" i="1">
-                <a:solidFill>
-                  <a:srgbClr val="8C8C8C"/>
-                </a:solidFill>
-                <a:latin typeface="Arial"/>
-              </a:rPr>
-              <a:t/>
             </a:r>
           </a:p>
         </p:txBody>
@@ -4082,8 +3872,8 @@
         </p:nvSpPr>
         <p:spPr>
           <a:xfrm>
-            <a:off x="594360" y="2258568"/>
-            <a:ext cx="11002975" cy="685800"/>
+            <a:off x="640080" y="2052828"/>
+            <a:ext cx="10911535" cy="731520"/>
           </a:xfrm>
           <a:prstGeom prst="rect">
             <a:avLst/>
@@ -4098,7 +3888,7 @@
           <a:p>
             <a:pPr algn="ctr"/>
             <a:r>
-              <a:rPr sz="4266" b="1" i="0">
+              <a:rPr sz="4600" b="1" i="0">
                 <a:solidFill>
                   <a:srgbClr val="FFFFFF"/>
                 </a:solidFill>
@@ -4117,8 +3907,8 @@
         </p:nvSpPr>
         <p:spPr>
           <a:xfrm>
-            <a:off x="594360" y="2980944"/>
-            <a:ext cx="11002975" cy="347472"/>
+            <a:off x="640080" y="2985516"/>
+            <a:ext cx="10911535" cy="731520"/>
           </a:xfrm>
           <a:prstGeom prst="rect">
             <a:avLst/>
@@ -4133,83 +3923,13 @@
           <a:p>
             <a:pPr algn="ctr"/>
             <a:r>
-              <a:rPr sz="2200" b="0" i="1">
-                <a:solidFill>
-                  <a:srgbClr val="8C8C8C"/>
-                </a:solidFill>
-                <a:latin typeface="Arial"/>
-              </a:rPr>
-              <a:t/>
-            </a:r>
-          </a:p>
-        </p:txBody>
-      </p:sp>
-      <p:sp>
-        <p:nvSpPr>
-          <p:cNvPr id="4" name="TextBox 3"/>
-          <p:cNvSpPr txBox="1"/>
-          <p:nvPr/>
-        </p:nvSpPr>
-        <p:spPr>
-          <a:xfrm>
-            <a:off x="594360" y="3529584"/>
-            <a:ext cx="11002975" cy="685800"/>
-          </a:xfrm>
-          <a:prstGeom prst="rect">
-            <a:avLst/>
-          </a:prstGeom>
-          <a:noFill/>
-        </p:spPr>
-        <p:txBody>
-          <a:bodyPr wrap="square">
-            <a:spAutoFit/>
-          </a:bodyPr>
-          <a:lstStyle/>
-          <a:p>
-            <a:pPr algn="ctr"/>
-            <a:r>
-              <a:rPr sz="2873" b="1" i="0">
+              <a:rPr sz="3100" b="1" i="0">
                 <a:solidFill>
                   <a:srgbClr val="FFFFFF"/>
                 </a:solidFill>
                 <a:latin typeface="Arial"/>
               </a:rPr>
               <a:t>Pois na minha necessidade o poder Dele é mostrado</a:t>
-            </a:r>
-          </a:p>
-        </p:txBody>
-      </p:sp>
-      <p:sp>
-        <p:nvSpPr>
-          <p:cNvPr id="5" name="TextBox 4"/>
-          <p:cNvSpPr txBox="1"/>
-          <p:nvPr/>
-        </p:nvSpPr>
-        <p:spPr>
-          <a:xfrm>
-            <a:off x="594360" y="4251960"/>
-            <a:ext cx="11002975" cy="347472"/>
-          </a:xfrm>
-          <a:prstGeom prst="rect">
-            <a:avLst/>
-          </a:prstGeom>
-          <a:noFill/>
-        </p:spPr>
-        <p:txBody>
-          <a:bodyPr wrap="square">
-            <a:spAutoFit/>
-          </a:bodyPr>
-          <a:lstStyle/>
-          <a:p>
-            <a:pPr algn="ctr"/>
-            <a:r>
-              <a:rPr sz="2200" b="0" i="1">
-                <a:solidFill>
-                  <a:srgbClr val="8C8C8C"/>
-                </a:solidFill>
-                <a:latin typeface="Arial"/>
-              </a:rPr>
-              <a:t/>
             </a:r>
           </a:p>
         </p:txBody>
@@ -4248,8 +3968,8 @@
         </p:nvSpPr>
         <p:spPr>
           <a:xfrm>
-            <a:off x="594360" y="2894076"/>
-            <a:ext cx="11002975" cy="685800"/>
+            <a:off x="640080" y="2702052"/>
+            <a:ext cx="10911535" cy="731520"/>
           </a:xfrm>
           <a:prstGeom prst="rect">
             <a:avLst/>
@@ -4264,48 +3984,13 @@
           <a:p>
             <a:pPr algn="ctr"/>
             <a:r>
-              <a:rPr sz="4400" b="1" i="0">
+              <a:rPr sz="4800" b="1" i="0">
                 <a:solidFill>
                   <a:srgbClr val="FFFFFF"/>
                 </a:solidFill>
                 <a:latin typeface="Arial"/>
               </a:rPr>
               <a:t>Não eu, mas Cristo em mim</a:t>
-            </a:r>
-          </a:p>
-        </p:txBody>
-      </p:sp>
-      <p:sp>
-        <p:nvSpPr>
-          <p:cNvPr id="3" name="TextBox 2"/>
-          <p:cNvSpPr txBox="1"/>
-          <p:nvPr/>
-        </p:nvSpPr>
-        <p:spPr>
-          <a:xfrm>
-            <a:off x="594360" y="3616452"/>
-            <a:ext cx="11002975" cy="347472"/>
-          </a:xfrm>
-          <a:prstGeom prst="rect">
-            <a:avLst/>
-          </a:prstGeom>
-          <a:noFill/>
-        </p:spPr>
-        <p:txBody>
-          <a:bodyPr wrap="square">
-            <a:spAutoFit/>
-          </a:bodyPr>
-          <a:lstStyle/>
-          <a:p>
-            <a:pPr algn="ctr"/>
-            <a:r>
-              <a:rPr sz="2200" b="0" i="1">
-                <a:solidFill>
-                  <a:srgbClr val="8C8C8C"/>
-                </a:solidFill>
-                <a:latin typeface="Arial"/>
-              </a:rPr>
-              <a:t/>
             </a:r>
           </a:p>
         </p:txBody>
@@ -4344,8 +4029,8 @@
         </p:nvSpPr>
         <p:spPr>
           <a:xfrm>
-            <a:off x="594360" y="1837944"/>
-            <a:ext cx="11002975" cy="685800"/>
+            <a:off x="640080" y="1650492"/>
+            <a:ext cx="10911535" cy="731520"/>
           </a:xfrm>
           <a:prstGeom prst="rect">
             <a:avLst/>
@@ -4360,7 +4045,7 @@
           <a:p>
             <a:pPr algn="ctr"/>
             <a:r>
-              <a:rPr sz="4400" b="1" i="0">
+              <a:rPr sz="4800" b="1" i="0">
                 <a:solidFill>
                   <a:srgbClr val="FFFFFF"/>
                 </a:solidFill>
@@ -4379,8 +4064,8 @@
         </p:nvSpPr>
         <p:spPr>
           <a:xfrm>
-            <a:off x="594360" y="2560320"/>
-            <a:ext cx="11002975" cy="384048"/>
+            <a:off x="640080" y="2418588"/>
+            <a:ext cx="10911535" cy="365760"/>
           </a:xfrm>
           <a:prstGeom prst="rect">
             <a:avLst/>
@@ -4395,9 +4080,9 @@
           <a:p>
             <a:pPr algn="ctr"/>
             <a:r>
-              <a:rPr sz="2016" b="0" i="1">
-                <a:solidFill>
-                  <a:srgbClr val="B4B4B4"/>
+              <a:rPr sz="2400" b="0" i="1">
+                <a:solidFill>
+                  <a:srgbClr val="AAAAAA"/>
                 </a:solidFill>
                 <a:latin typeface="Arial"/>
               </a:rPr>
@@ -4414,8 +4099,8 @@
         </p:nvSpPr>
         <p:spPr>
           <a:xfrm>
-            <a:off x="594360" y="2980944"/>
-            <a:ext cx="11002975" cy="347472"/>
+            <a:off x="640080" y="2985516"/>
+            <a:ext cx="10911535" cy="731520"/>
           </a:xfrm>
           <a:prstGeom prst="rect">
             <a:avLst/>
@@ -4430,13 +4115,13 @@
           <a:p>
             <a:pPr algn="ctr"/>
             <a:r>
-              <a:rPr sz="2000" b="0" i="1">
-                <a:solidFill>
-                  <a:srgbClr val="8C8C8C"/>
+              <a:rPr sz="4800" b="1" i="0">
+                <a:solidFill>
+                  <a:srgbClr val="FFFFFF"/>
                 </a:solidFill>
                 <a:latin typeface="Arial"/>
               </a:rPr>
-              <a:t/>
+              <a:t>代わりに苦しんだ主は よみがえり死を砕く</a:t>
             </a:r>
           </a:p>
         </p:txBody>
@@ -4449,8 +4134,8 @@
         </p:nvSpPr>
         <p:spPr>
           <a:xfrm>
-            <a:off x="594360" y="3529584"/>
-            <a:ext cx="11002975" cy="685800"/>
+            <a:off x="640080" y="3753612"/>
+            <a:ext cx="10911535" cy="365760"/>
           </a:xfrm>
           <a:prstGeom prst="rect">
             <a:avLst/>
@@ -4465,13 +4150,13 @@
           <a:p>
             <a:pPr algn="ctr"/>
             <a:r>
-              <a:rPr sz="4400" b="1" i="0">
-                <a:solidFill>
-                  <a:srgbClr val="FFFFFF"/>
+              <a:rPr sz="2400" b="0" i="1">
+                <a:solidFill>
+                  <a:srgbClr val="AAAAAA"/>
                 </a:solidFill>
                 <a:latin typeface="Arial"/>
               </a:rPr>
-              <a:t>代わりに苦しんだ主は よみがえり死を砕く</a:t>
+              <a:t>kawari ni kurushinda shu wa  yomigaeri shi wo kudaku</a:t>
             </a:r>
           </a:p>
         </p:txBody>
@@ -4484,8 +4169,8 @@
         </p:nvSpPr>
         <p:spPr>
           <a:xfrm>
-            <a:off x="594360" y="4251960"/>
-            <a:ext cx="11002975" cy="384048"/>
+            <a:off x="640080" y="4530852"/>
+            <a:ext cx="10911535" cy="310896"/>
           </a:xfrm>
           <a:prstGeom prst="rect">
             <a:avLst/>
@@ -4500,13 +4185,13 @@
           <a:p>
             <a:pPr algn="ctr"/>
             <a:r>
-              <a:rPr sz="1938" b="0" i="1">
-                <a:solidFill>
-                  <a:srgbClr val="B4B4B4"/>
+              <a:rPr sz="2000" b="0" i="1">
+                <a:solidFill>
+                  <a:srgbClr val="828282"/>
                 </a:solidFill>
                 <a:latin typeface="Arial"/>
               </a:rPr>
-              <a:t>kawari ni kurushinda shu wa  yomigaeri shi wo kudaku</a:t>
+              <a:t>A isso eu me agarro, minha esperança é somente Jesus</a:t>
             </a:r>
           </a:p>
         </p:txBody>
@@ -4519,8 +4204,8 @@
         </p:nvSpPr>
         <p:spPr>
           <a:xfrm>
-            <a:off x="594360" y="4672584"/>
-            <a:ext cx="11002975" cy="347472"/>
+            <a:off x="640080" y="4896612"/>
+            <a:ext cx="10911535" cy="310896"/>
           </a:xfrm>
           <a:prstGeom prst="rect">
             <a:avLst/>
@@ -4537,11 +4222,11 @@
             <a:r>
               <a:rPr sz="2000" b="0" i="1">
                 <a:solidFill>
-                  <a:srgbClr val="8C8C8C"/>
+                  <a:srgbClr val="828282"/>
                 </a:solidFill>
                 <a:latin typeface="Arial"/>
               </a:rPr>
-              <a:t/>
+              <a:t>Pois a minha vida está totalmente ligada à Sua</a:t>
             </a:r>
           </a:p>
         </p:txBody>
@@ -4580,8 +4265,8 @@
         </p:nvSpPr>
         <p:spPr>
           <a:xfrm>
-            <a:off x="594360" y="1837944"/>
-            <a:ext cx="11002975" cy="685800"/>
+            <a:off x="640080" y="1650492"/>
+            <a:ext cx="10911535" cy="731520"/>
           </a:xfrm>
           <a:prstGeom prst="rect">
             <a:avLst/>
@@ -4596,7 +4281,7 @@
           <a:p>
             <a:pPr algn="ctr"/>
             <a:r>
-              <a:rPr sz="4400" b="1" i="0">
+              <a:rPr sz="4800" b="1" i="0">
                 <a:solidFill>
                   <a:srgbClr val="FFFFFF"/>
                 </a:solidFill>
@@ -4615,8 +4300,8 @@
         </p:nvSpPr>
         <p:spPr>
           <a:xfrm>
-            <a:off x="594360" y="2560320"/>
-            <a:ext cx="11002975" cy="384048"/>
+            <a:off x="640080" y="2418588"/>
+            <a:ext cx="10911535" cy="365760"/>
           </a:xfrm>
           <a:prstGeom prst="rect">
             <a:avLst/>
@@ -4631,9 +4316,9 @@
           <a:p>
             <a:pPr algn="ctr"/>
             <a:r>
-              <a:rPr sz="2144" b="0" i="1">
-                <a:solidFill>
-                  <a:srgbClr val="B4B4B4"/>
+              <a:rPr sz="2400" b="0" i="1">
+                <a:solidFill>
+                  <a:srgbClr val="AAAAAA"/>
                 </a:solidFill>
                 <a:latin typeface="Arial"/>
               </a:rPr>
@@ -4650,8 +4335,8 @@
         </p:nvSpPr>
         <p:spPr>
           <a:xfrm>
-            <a:off x="594360" y="2980944"/>
-            <a:ext cx="11002975" cy="347472"/>
+            <a:off x="640080" y="2985516"/>
+            <a:ext cx="10911535" cy="731520"/>
           </a:xfrm>
           <a:prstGeom prst="rect">
             <a:avLst/>
@@ -4666,13 +4351,13 @@
           <a:p>
             <a:pPr algn="ctr"/>
             <a:r>
-              <a:rPr sz="2000" b="0" i="1">
-                <a:solidFill>
-                  <a:srgbClr val="8C8C8C"/>
+              <a:rPr sz="4800" b="1" i="0">
+                <a:solidFill>
+                  <a:srgbClr val="FFFFFF"/>
                 </a:solidFill>
                 <a:latin typeface="Arial"/>
               </a:rPr>
-              <a:t/>
+              <a:t>鎖解かれ自由になる キリストにあって</a:t>
             </a:r>
           </a:p>
         </p:txBody>
@@ -4685,8 +4370,8 @@
         </p:nvSpPr>
         <p:spPr>
           <a:xfrm>
-            <a:off x="594360" y="3529584"/>
-            <a:ext cx="11002975" cy="685800"/>
+            <a:off x="640080" y="3753612"/>
+            <a:ext cx="10911535" cy="365760"/>
           </a:xfrm>
           <a:prstGeom prst="rect">
             <a:avLst/>
@@ -4701,13 +4386,13 @@
           <a:p>
             <a:pPr algn="ctr"/>
             <a:r>
-              <a:rPr sz="4400" b="1" i="0">
-                <a:solidFill>
-                  <a:srgbClr val="FFFFFF"/>
+              <a:rPr sz="2400" b="0" i="1">
+                <a:solidFill>
+                  <a:srgbClr val="AAAAAA"/>
                 </a:solidFill>
                 <a:latin typeface="Arial"/>
               </a:rPr>
-              <a:t>鎖解かれ自由になる キリストにあって</a:t>
+              <a:t>kusari tokare jiyuu ni naru kirisuto ni atte</a:t>
             </a:r>
           </a:p>
         </p:txBody>
@@ -4720,8 +4405,8 @@
         </p:nvSpPr>
         <p:spPr>
           <a:xfrm>
-            <a:off x="594360" y="4251960"/>
-            <a:ext cx="11002975" cy="384048"/>
+            <a:off x="640080" y="4530852"/>
+            <a:ext cx="10911535" cy="310896"/>
           </a:xfrm>
           <a:prstGeom prst="rect">
             <a:avLst/>
@@ -4736,13 +4421,13 @@
           <a:p>
             <a:pPr algn="ctr"/>
             <a:r>
-              <a:rPr sz="2290" b="0" i="1">
-                <a:solidFill>
-                  <a:srgbClr val="B4B4B4"/>
+              <a:rPr sz="2000" b="0" i="1">
+                <a:solidFill>
+                  <a:srgbClr val="828282"/>
                 </a:solidFill>
                 <a:latin typeface="Arial"/>
               </a:rPr>
-              <a:t>kusari tokare jiyuu ni naru kirisuto ni atte</a:t>
+              <a:t>Óh que estranho e divino, eu posso cantar: Tudo é meu!</a:t>
             </a:r>
           </a:p>
         </p:txBody>
@@ -4755,8 +4440,8 @@
         </p:nvSpPr>
         <p:spPr>
           <a:xfrm>
-            <a:off x="594360" y="4672584"/>
-            <a:ext cx="11002975" cy="347472"/>
+            <a:off x="640080" y="4896612"/>
+            <a:ext cx="10911535" cy="310896"/>
           </a:xfrm>
           <a:prstGeom prst="rect">
             <a:avLst/>
@@ -4773,11 +4458,11 @@
             <a:r>
               <a:rPr sz="2000" b="0" i="1">
                 <a:solidFill>
-                  <a:srgbClr val="8C8C8C"/>
+                  <a:srgbClr val="828282"/>
                 </a:solidFill>
                 <a:latin typeface="Arial"/>
               </a:rPr>
-              <a:t/>
+              <a:t>Não eu, mas Cristo em mim</a:t>
             </a:r>
           </a:p>
         </p:txBody>

--- a/output_pptx/Yet_Not_I_But_Through_Christ_In_Me.pptx
+++ b/output_pptx/Yet_Not_I_But_Through_Christ_In_Me.pptx
@@ -3646,6 +3646,76 @@
           </a:p>
         </p:txBody>
       </p:sp>
+      <p:sp>
+        <p:nvSpPr>
+          <p:cNvPr id="4" name="TextBox 3"/>
+          <p:cNvSpPr txBox="1"/>
+          <p:nvPr/>
+        </p:nvSpPr>
+        <p:spPr>
+          <a:xfrm>
+            <a:off x="640080" y="4128516"/>
+            <a:ext cx="10911535" cy="310896"/>
+          </a:xfrm>
+          <a:prstGeom prst="rect">
+            <a:avLst/>
+          </a:prstGeom>
+          <a:noFill/>
+        </p:spPr>
+        <p:txBody>
+          <a:bodyPr wrap="square">
+            <a:spAutoFit/>
+          </a:bodyPr>
+          <a:lstStyle/>
+          <a:p>
+            <a:pPr algn="ctr"/>
+            <a:r>
+              <a:rPr sz="2000" b="0" i="0">
+                <a:solidFill>
+                  <a:srgbClr val="828282"/>
+                </a:solidFill>
+                <a:latin typeface="Arial"/>
+              </a:rPr>
+              <a:t>私はこれにしがみつく、私の希望はただイエスのみ</a:t>
+            </a:r>
+          </a:p>
+        </p:txBody>
+      </p:sp>
+      <p:sp>
+        <p:nvSpPr>
+          <p:cNvPr id="5" name="TextBox 4"/>
+          <p:cNvSpPr txBox="1"/>
+          <p:nvPr/>
+        </p:nvSpPr>
+        <p:spPr>
+          <a:xfrm>
+            <a:off x="640080" y="4494276"/>
+            <a:ext cx="10911535" cy="310896"/>
+          </a:xfrm>
+          <a:prstGeom prst="rect">
+            <a:avLst/>
+          </a:prstGeom>
+          <a:noFill/>
+        </p:spPr>
+        <p:txBody>
+          <a:bodyPr wrap="square">
+            <a:spAutoFit/>
+          </a:bodyPr>
+          <a:lstStyle/>
+          <a:p>
+            <a:pPr algn="ctr"/>
+            <a:r>
+              <a:rPr sz="2000" b="0" i="0">
+                <a:solidFill>
+                  <a:srgbClr val="828282"/>
+                </a:solidFill>
+                <a:latin typeface="Arial"/>
+              </a:rPr>
+              <a:t>なぜなら私の人生は完全に彼のものと結ばれているから</a:t>
+            </a:r>
+          </a:p>
+        </p:txBody>
+      </p:sp>
     </p:spTree>
   </p:cSld>
   <p:clrMapOvr>
@@ -3742,6 +3812,76 @@
           </a:p>
         </p:txBody>
       </p:sp>
+      <p:sp>
+        <p:nvSpPr>
+          <p:cNvPr id="4" name="TextBox 3"/>
+          <p:cNvSpPr txBox="1"/>
+          <p:nvPr/>
+        </p:nvSpPr>
+        <p:spPr>
+          <a:xfrm>
+            <a:off x="640080" y="4128516"/>
+            <a:ext cx="10911535" cy="310896"/>
+          </a:xfrm>
+          <a:prstGeom prst="rect">
+            <a:avLst/>
+          </a:prstGeom>
+          <a:noFill/>
+        </p:spPr>
+        <p:txBody>
+          <a:bodyPr wrap="square">
+            <a:spAutoFit/>
+          </a:bodyPr>
+          <a:lstStyle/>
+          <a:p>
+            <a:pPr algn="ctr"/>
+            <a:r>
+              <a:rPr sz="2000" b="0" i="0">
+                <a:solidFill>
+                  <a:srgbClr val="828282"/>
+                </a:solidFill>
+                <a:latin typeface="Arial"/>
+              </a:rPr>
+              <a:t>なんと奇妙で神聖な、私は歌うことができる：すべては私のもの！</a:t>
+            </a:r>
+          </a:p>
+        </p:txBody>
+      </p:sp>
+      <p:sp>
+        <p:nvSpPr>
+          <p:cNvPr id="5" name="TextBox 4"/>
+          <p:cNvSpPr txBox="1"/>
+          <p:nvPr/>
+        </p:nvSpPr>
+        <p:spPr>
+          <a:xfrm>
+            <a:off x="640080" y="4494276"/>
+            <a:ext cx="10911535" cy="310896"/>
+          </a:xfrm>
+          <a:prstGeom prst="rect">
+            <a:avLst/>
+          </a:prstGeom>
+          <a:noFill/>
+        </p:spPr>
+        <p:txBody>
+          <a:bodyPr wrap="square">
+            <a:spAutoFit/>
+          </a:bodyPr>
+          <a:lstStyle/>
+          <a:p>
+            <a:pPr algn="ctr"/>
+            <a:r>
+              <a:rPr sz="2000" b="0" i="0">
+                <a:solidFill>
+                  <a:srgbClr val="828282"/>
+                </a:solidFill>
+                <a:latin typeface="Arial"/>
+              </a:rPr>
+              <a:t>私ではなく、私の中のキリスト</a:t>
+            </a:r>
+          </a:p>
+        </p:txBody>
+      </p:sp>
     </p:spTree>
   </p:cSld>
   <p:clrMapOvr>
@@ -3838,6 +3978,76 @@
           </a:p>
         </p:txBody>
       </p:sp>
+      <p:sp>
+        <p:nvSpPr>
+          <p:cNvPr id="4" name="TextBox 3"/>
+          <p:cNvSpPr txBox="1"/>
+          <p:nvPr/>
+        </p:nvSpPr>
+        <p:spPr>
+          <a:xfrm>
+            <a:off x="640080" y="4128516"/>
+            <a:ext cx="10911535" cy="310896"/>
+          </a:xfrm>
+          <a:prstGeom prst="rect">
+            <a:avLst/>
+          </a:prstGeom>
+          <a:noFill/>
+        </p:spPr>
+        <p:txBody>
+          <a:bodyPr wrap="square">
+            <a:spAutoFit/>
+          </a:bodyPr>
+          <a:lstStyle/>
+          <a:p>
+            <a:pPr algn="ctr"/>
+            <a:r>
+              <a:rPr sz="2000" b="0" i="0">
+                <a:solidFill>
+                  <a:srgbClr val="828282"/>
+                </a:solidFill>
+                <a:latin typeface="Arial"/>
+              </a:rPr>
+              <a:t>夜は暗いが、私は見捨てられていない</a:t>
+            </a:r>
+          </a:p>
+        </p:txBody>
+      </p:sp>
+      <p:sp>
+        <p:nvSpPr>
+          <p:cNvPr id="5" name="TextBox 4"/>
+          <p:cNvSpPr txBox="1"/>
+          <p:nvPr/>
+        </p:nvSpPr>
+        <p:spPr>
+          <a:xfrm>
+            <a:off x="640080" y="4494276"/>
+            <a:ext cx="10911535" cy="310896"/>
+          </a:xfrm>
+          <a:prstGeom prst="rect">
+            <a:avLst/>
+          </a:prstGeom>
+          <a:noFill/>
+        </p:spPr>
+        <p:txBody>
+          <a:bodyPr wrap="square">
+            <a:spAutoFit/>
+          </a:bodyPr>
+          <a:lstStyle/>
+          <a:p>
+            <a:pPr algn="ctr"/>
+            <a:r>
+              <a:rPr sz="2000" b="0" i="0">
+                <a:solidFill>
+                  <a:srgbClr val="828282"/>
+                </a:solidFill>
+                <a:latin typeface="Arial"/>
+              </a:rPr>
+              <a:t>なぜなら私の側に救い主は留まるから</a:t>
+            </a:r>
+          </a:p>
+        </p:txBody>
+      </p:sp>
     </p:spTree>
   </p:cSld>
   <p:clrMapOvr>
@@ -3934,6 +4144,76 @@
           </a:p>
         </p:txBody>
       </p:sp>
+      <p:sp>
+        <p:nvSpPr>
+          <p:cNvPr id="4" name="TextBox 3"/>
+          <p:cNvSpPr txBox="1"/>
+          <p:nvPr/>
+        </p:nvSpPr>
+        <p:spPr>
+          <a:xfrm>
+            <a:off x="640080" y="4128516"/>
+            <a:ext cx="10911535" cy="310896"/>
+          </a:xfrm>
+          <a:prstGeom prst="rect">
+            <a:avLst/>
+          </a:prstGeom>
+          <a:noFill/>
+        </p:spPr>
+        <p:txBody>
+          <a:bodyPr wrap="square">
+            <a:spAutoFit/>
+          </a:bodyPr>
+          <a:lstStyle/>
+          <a:p>
+            <a:pPr algn="ctr"/>
+            <a:r>
+              <a:rPr sz="2000" b="0" i="0">
+                <a:solidFill>
+                  <a:srgbClr val="828282"/>
+                </a:solidFill>
+                <a:latin typeface="Arial"/>
+              </a:rPr>
+              <a:t>私は弱さと喜びの中で働く</a:t>
+            </a:r>
+          </a:p>
+        </p:txBody>
+      </p:sp>
+      <p:sp>
+        <p:nvSpPr>
+          <p:cNvPr id="5" name="TextBox 4"/>
+          <p:cNvSpPr txBox="1"/>
+          <p:nvPr/>
+        </p:nvSpPr>
+        <p:spPr>
+          <a:xfrm>
+            <a:off x="640080" y="4494276"/>
+            <a:ext cx="10911535" cy="310896"/>
+          </a:xfrm>
+          <a:prstGeom prst="rect">
+            <a:avLst/>
+          </a:prstGeom>
+          <a:noFill/>
+        </p:spPr>
+        <p:txBody>
+          <a:bodyPr wrap="square">
+            <a:spAutoFit/>
+          </a:bodyPr>
+          <a:lstStyle/>
+          <a:p>
+            <a:pPr algn="ctr"/>
+            <a:r>
+              <a:rPr sz="2000" b="0" i="0">
+                <a:solidFill>
+                  <a:srgbClr val="828282"/>
+                </a:solidFill>
+                <a:latin typeface="Arial"/>
+              </a:rPr>
+              <a:t>なぜなら私の必要の中で彼の力が示されるから</a:t>
+            </a:r>
+          </a:p>
+        </p:txBody>
+      </p:sp>
     </p:spTree>
   </p:cSld>
   <p:clrMapOvr>
@@ -3991,6 +4271,41 @@
                 <a:latin typeface="Arial"/>
               </a:rPr>
               <a:t>Não eu, mas Cristo em mim</a:t>
+            </a:r>
+          </a:p>
+        </p:txBody>
+      </p:sp>
+      <p:sp>
+        <p:nvSpPr>
+          <p:cNvPr id="3" name="TextBox 2"/>
+          <p:cNvSpPr txBox="1"/>
+          <p:nvPr/>
+        </p:nvSpPr>
+        <p:spPr>
+          <a:xfrm>
+            <a:off x="640080" y="3845052"/>
+            <a:ext cx="10911535" cy="310896"/>
+          </a:xfrm>
+          <a:prstGeom prst="rect">
+            <a:avLst/>
+          </a:prstGeom>
+          <a:noFill/>
+        </p:spPr>
+        <p:txBody>
+          <a:bodyPr wrap="square">
+            <a:spAutoFit/>
+          </a:bodyPr>
+          <a:lstStyle/>
+          <a:p>
+            <a:pPr algn="ctr"/>
+            <a:r>
+              <a:rPr sz="2000" b="0" i="0">
+                <a:solidFill>
+                  <a:srgbClr val="828282"/>
+                </a:solidFill>
+                <a:latin typeface="Arial"/>
+              </a:rPr>
+              <a:t>私ではなく、私の中のキリスト</a:t>
             </a:r>
           </a:p>
         </p:txBody>
